--- a/lectures/week-03/lecture-zh.pptx
+++ b/lectures/week-03/lecture-zh.pptx
@@ -16148,7 +16148,7 @@
                 </a:solidFill>
                 <a:latin typeface="Source Han Sans SC"/>
               </a:rPr>
-              <a:t>理论约 90 min · Lab 约 75 min · 小测与小结 15 min</a:t>
+              <a:t>理论约 90 min · Lab 80 min · 小测与小结 10 min</a:t>
             </a:r>
           </a:p>
         </p:txBody>
@@ -22311,8 +22311,8 @@
                 </a:solidFill>
                 <a:latin typeface="Source Han Sans SC"/>
               </a:rPr>
-              <a:t>75 分钟，把本周的六步管道真正跑通：
-为指定数据集实现自定义 Dataset 与 DataLoader，完成探索、划分、增强与不平衡统计，产出数据卡片。</a:t>
+              <a:t>80 分钟，把本周的六步管道真正跑通：
+先按「是否需要统计量」给清洗动作分组，再实现自定义 Dataset 与 DataLoader，完成探索、划分、增强与不平衡统计，产出数据卡片。</a:t>
             </a:r>
           </a:p>
         </p:txBody>
@@ -23243,7 +23243,7 @@
                 </a:solidFill>
                 <a:latin typeface="Source Han Sans SC"/>
               </a:rPr>
-              <a:t>实验 2 的六件事</a:t>
+              <a:t>实验 2 的七件事</a:t>
             </a:r>
           </a:p>
         </p:txBody>
@@ -23757,7 +23757,7 @@
                 </a:solidFill>
                 <a:latin typeface="Source Han Sans SC"/>
               </a:rPr>
-              <a:t>B · 可复现的划分</a:t>
+              <a:t>B · 清洗原始表（无需统计量）</a:t>
             </a:r>
           </a:p>
         </p:txBody>
@@ -23838,7 +23838,7 @@
                 </a:solidFill>
                 <a:latin typeface="Source Han Sans SC"/>
               </a:rPr>
-              <a:t>• 用固定种子划分，并说明为什么选随机/分层/时间/分组</a:t>
+              <a:t>• 去重、单位换算、编码统一，各写清数值判据</a:t>
             </a:r>
           </a:p>
           <a:p>
@@ -23857,7 +23857,7 @@
                 </a:solidFill>
                 <a:latin typeface="Source Han Sans SC"/>
               </a:rPr>
-              <a:t>• 报告每个集合的样本量与类别比例</a:t>
+              <a:t>• 预测删除数必须等于实际删除数（812 = 812）</a:t>
             </a:r>
           </a:p>
         </p:txBody>
@@ -23986,7 +23986,7 @@
                 </a:solidFill>
                 <a:latin typeface="Source Han Sans SC"/>
               </a:rPr>
-              <a:t>C · 自定义 Dataset</a:t>
+              <a:t>C · 先划分，再只用训练集算统计量</a:t>
             </a:r>
           </a:p>
         </p:txBody>
@@ -24067,7 +24067,7 @@
                 </a:solidFill>
                 <a:latin typeface="Source Han Sans SC"/>
               </a:rPr>
-              <a:t>• 实现 __len__ 与 __getitem__，返回 (x, y)</a:t>
+              <a:t>• 用固定种子划分，并说明为什么选随机/分层/时间/分组</a:t>
             </a:r>
           </a:p>
           <a:p>
@@ -24086,7 +24086,7 @@
                 </a:solidFill>
                 <a:latin typeface="Source Han Sans SC"/>
               </a:rPr>
-              <a:t>• 验证 ds[0] 的形状与 dtype 正确</a:t>
+              <a:t>• 报告每个集合的样本量与类别比例</a:t>
             </a:r>
           </a:p>
         </p:txBody>
@@ -24215,7 +24215,7 @@
                 </a:solidFill>
                 <a:latin typeface="Source Han Sans SC"/>
               </a:rPr>
-              <a:t>D · DataLoader 与增强</a:t>
+              <a:t>D · 自定义 Dataset</a:t>
             </a:r>
           </a:p>
         </p:txBody>
@@ -24296,7 +24296,7 @@
                 </a:solidFill>
                 <a:latin typeface="Source Han Sans SC"/>
               </a:rPr>
-              <a:t>• 设置 batch_size、shuffle、num_workers 并说明理由</a:t>
+              <a:t>• 实现 __len__ 与 __getitem__，返回 (x, y)</a:t>
             </a:r>
           </a:p>
           <a:p>
@@ -24315,7 +24315,7 @@
                 </a:solidFill>
                 <a:latin typeface="Source Han Sans SC"/>
               </a:rPr>
-              <a:t>• 增强只加在训练集，并给出对照</a:t>
+              <a:t>• 验证 ds[0] 的形状与 dtype 正确</a:t>
             </a:r>
           </a:p>
         </p:txBody>
@@ -24444,7 +24444,7 @@
                 </a:solidFill>
                 <a:latin typeface="Source Han Sans SC"/>
               </a:rPr>
-              <a:t>E · 不平衡统计与处理</a:t>
+              <a:t>E · DataLoader 与增强</a:t>
             </a:r>
           </a:p>
         </p:txBody>
@@ -24525,7 +24525,7 @@
                 </a:solidFill>
                 <a:latin typeface="Source Han Sans SC"/>
               </a:rPr>
-              <a:t>• 统计各类占比，选重采样或代价敏感损失</a:t>
+              <a:t>• 设置 batch_size、shuffle、num_workers 并说明理由</a:t>
             </a:r>
           </a:p>
           <a:p>
@@ -24544,7 +24544,7 @@
                 </a:solidFill>
                 <a:latin typeface="Source Han Sans SC"/>
               </a:rPr>
-              <a:t>• 给出处理前后的类别分布对照</a:t>
+              <a:t>• 增强只加在训练集，并给出对照</a:t>
             </a:r>
           </a:p>
         </p:txBody>
@@ -24673,7 +24673,7 @@
                 </a:solidFill>
                 <a:latin typeface="Source Han Sans SC"/>
               </a:rPr>
-              <a:t>F · 尊重数据与隐私</a:t>
+              <a:t>F · 不平衡统计与处理</a:t>
             </a:r>
           </a:p>
         </p:txBody>
@@ -24726,6 +24726,235 @@
         <p:spPr>
           <a:xfrm>
             <a:off x="8228879" y="3823200"/>
+            <a:ext cx="2940839" cy="928799"/>
+          </a:xfrm>
+          <a:prstGeom prst="rect">
+            <a:avLst/>
+          </a:prstGeom>
+          <a:noFill/>
+        </p:spPr>
+        <p:txBody>
+          <a:bodyPr wrap="square" anchor="t" lIns="0" rIns="0" tIns="0" bIns="0">
+            <a:spAutoFit/>
+          </a:bodyPr>
+          <a:lstStyle/>
+          <a:p>
+            <a:pPr algn="l">
+              <a:lnSpc>
+                <a:spcPct val="140000"/>
+              </a:lnSpc>
+              <a:spcAft>
+                <a:spcPts val="400"/>
+              </a:spcAft>
+            </a:pPr>
+            <a:r>
+              <a:rPr sz="1200" b="0" i="0">
+                <a:solidFill>
+                  <a:srgbClr val="1F2937"/>
+                </a:solidFill>
+                <a:latin typeface="Source Han Sans SC"/>
+              </a:rPr>
+              <a:t>• 统计各类占比，选重采样或代价敏感损失</a:t>
+            </a:r>
+          </a:p>
+          <a:p>
+            <a:pPr algn="l">
+              <a:lnSpc>
+                <a:spcPct val="140000"/>
+              </a:lnSpc>
+              <a:spcAft>
+                <a:spcPts val="400"/>
+              </a:spcAft>
+            </a:pPr>
+            <a:r>
+              <a:rPr sz="1200" b="0" i="0">
+                <a:solidFill>
+                  <a:srgbClr val="1F2937"/>
+                </a:solidFill>
+                <a:latin typeface="Source Han Sans SC"/>
+              </a:rPr>
+              <a:t>• 给出处理前后的类别分布对照</a:t>
+            </a:r>
+          </a:p>
+        </p:txBody>
+      </p:sp>
+      <p:sp>
+        <p:nvSpPr>
+          <p:cNvPr id="40" name="Rectangle 39"/>
+          <p:cNvSpPr/>
+          <p:nvPr/>
+        </p:nvSpPr>
+        <p:spPr>
+          <a:xfrm>
+            <a:off x="799200" y="5112000"/>
+            <a:ext cx="3387239" cy="1692000"/>
+          </a:xfrm>
+          <a:prstGeom prst="rect">
+            <a:avLst/>
+          </a:prstGeom>
+          <a:solidFill>
+            <a:srgbClr val="F0F5FC"/>
+          </a:solidFill>
+          <a:ln w="9525">
+            <a:solidFill>
+              <a:srgbClr val="E5E7EB"/>
+            </a:solidFill>
+          </a:ln>
+          <a:effectLst/>
+        </p:spPr>
+        <p:style>
+          <a:lnRef idx="1">
+            <a:schemeClr val="accent1"/>
+          </a:lnRef>
+          <a:fillRef idx="3">
+            <a:schemeClr val="accent1"/>
+          </a:fillRef>
+          <a:effectRef idx="2">
+            <a:schemeClr val="accent1"/>
+          </a:effectRef>
+          <a:fontRef idx="minor">
+            <a:schemeClr val="lt1"/>
+          </a:fontRef>
+        </p:style>
+        <p:txBody>
+          <a:bodyPr rtlCol="0" anchor="ctr" wrap="square"/>
+          <a:lstStyle/>
+          <a:p>
+            <a:pPr algn="ctr"/>
+          </a:p>
+        </p:txBody>
+      </p:sp>
+      <p:sp>
+        <p:nvSpPr>
+          <p:cNvPr id="41" name="Rectangle 40"/>
+          <p:cNvSpPr/>
+          <p:nvPr/>
+        </p:nvSpPr>
+        <p:spPr>
+          <a:xfrm>
+            <a:off x="799200" y="5112000"/>
+            <a:ext cx="32400" cy="1692000"/>
+          </a:xfrm>
+          <a:prstGeom prst="rect">
+            <a:avLst/>
+          </a:prstGeom>
+          <a:solidFill>
+            <a:srgbClr val="3D7BD9"/>
+          </a:solidFill>
+          <a:ln>
+            <a:noFill/>
+          </a:ln>
+          <a:effectLst/>
+        </p:spPr>
+        <p:style>
+          <a:lnRef idx="1">
+            <a:schemeClr val="accent1"/>
+          </a:lnRef>
+          <a:fillRef idx="3">
+            <a:schemeClr val="accent1"/>
+          </a:fillRef>
+          <a:effectRef idx="2">
+            <a:schemeClr val="accent1"/>
+          </a:effectRef>
+          <a:fontRef idx="minor">
+            <a:schemeClr val="lt1"/>
+          </a:fontRef>
+        </p:style>
+        <p:txBody>
+          <a:bodyPr rtlCol="0" anchor="ctr" wrap="square"/>
+          <a:lstStyle/>
+          <a:p>
+            <a:pPr algn="ctr"/>
+          </a:p>
+        </p:txBody>
+      </p:sp>
+      <p:sp>
+        <p:nvSpPr>
+          <p:cNvPr id="42" name="TextBox 41"/>
+          <p:cNvSpPr txBox="1"/>
+          <p:nvPr/>
+        </p:nvSpPr>
+        <p:spPr>
+          <a:xfrm>
+            <a:off x="1022400" y="5299200"/>
+            <a:ext cx="2940839" cy="223200"/>
+          </a:xfrm>
+          <a:prstGeom prst="rect">
+            <a:avLst/>
+          </a:prstGeom>
+          <a:noFill/>
+        </p:spPr>
+        <p:txBody>
+          <a:bodyPr wrap="square" anchor="t" lIns="0" rIns="0" tIns="0" bIns="0">
+            <a:spAutoFit/>
+          </a:bodyPr>
+          <a:lstStyle/>
+          <a:p>
+            <a:pPr algn="l">
+              <a:lnSpc>
+                <a:spcPct val="125000"/>
+              </a:lnSpc>
+            </a:pPr>
+            <a:r>
+              <a:rPr sz="1550" b="1" i="0">
+                <a:solidFill>
+                  <a:srgbClr val="0E3F8C"/>
+                </a:solidFill>
+                <a:latin typeface="Source Han Sans SC"/>
+              </a:rPr>
+              <a:t>G · 尊重数据与隐私</a:t>
+            </a:r>
+          </a:p>
+        </p:txBody>
+      </p:sp>
+      <p:sp>
+        <p:nvSpPr>
+          <p:cNvPr id="43" name="TextBox 42"/>
+          <p:cNvSpPr txBox="1"/>
+          <p:nvPr/>
+        </p:nvSpPr>
+        <p:spPr>
+          <a:xfrm>
+            <a:off x="1022400" y="5529600"/>
+            <a:ext cx="2940839" cy="151200"/>
+          </a:xfrm>
+          <a:prstGeom prst="rect">
+            <a:avLst/>
+          </a:prstGeom>
+          <a:noFill/>
+        </p:spPr>
+        <p:txBody>
+          <a:bodyPr wrap="square" anchor="t" lIns="0" rIns="0" tIns="0" bIns="0">
+            <a:spAutoFit/>
+          </a:bodyPr>
+          <a:lstStyle/>
+          <a:p>
+            <a:pPr algn="l">
+              <a:lnSpc>
+                <a:spcPct val="125000"/>
+              </a:lnSpc>
+            </a:pPr>
+            <a:r>
+              <a:rPr sz="1100" b="1" i="0">
+                <a:solidFill>
+                  <a:srgbClr val="3D7BD9"/>
+                </a:solidFill>
+                <a:latin typeface="Source Han Sans SC"/>
+              </a:rPr>
+              <a:t>task G</a:t>
+            </a:r>
+          </a:p>
+        </p:txBody>
+      </p:sp>
+      <p:sp>
+        <p:nvSpPr>
+          <p:cNvPr id="44" name="TextBox 43"/>
+          <p:cNvSpPr txBox="1"/>
+          <p:nvPr/>
+        </p:nvSpPr>
+        <p:spPr>
+          <a:xfrm>
+            <a:off x="1022400" y="5731200"/>
             <a:ext cx="2940839" cy="928799"/>
           </a:xfrm>
           <a:prstGeom prst="rect">
@@ -25357,7 +25586,7 @@
                 </a:solidFill>
                 <a:latin typeface="Menlo"/>
               </a:rPr>
-              <a:t>- 样本数 12,480 · 特征数 12 · 标签 5 类</a:t>
+              <a:t>- 11,668 行（原始 12,480，按主键去重删除 812）· 特征数 10 · 标签 5 类</a:t>
             </a:r>
           </a:p>
           <a:p>
@@ -25437,7 +25666,7 @@
                 </a:solidFill>
                 <a:latin typeface="Menlo"/>
               </a:rPr>
-              <a:t>- 缺失：age 3.2% -&gt; 用训练集中位数填补</a:t>
+              <a:t>- 缺失：age 3.2%（少数类 25% vs 其他 2.3%）-&gt; 用训练集中位数填补</a:t>
             </a:r>
           </a:p>
           <a:p>
@@ -25453,7 +25682,7 @@
                 </a:solidFill>
                 <a:latin typeface="Menlo"/>
               </a:rPr>
-              <a:t>- 异常：3 个离群值 -&gt; 截断到 1/99 分位</a:t>
+              <a:t>- 单位混用：935 条华氏记录 -&gt; 换算为摄氏（不是删掉）</a:t>
             </a:r>
           </a:p>
           <a:p>
@@ -25469,6 +25698,38 @@
                 </a:solidFill>
                 <a:latin typeface="Menlo"/>
               </a:rPr>
+              <a:t>- 编码不一致：material_code 10 种写法 -&gt; 归一为 5 个编码</a:t>
+            </a:r>
+          </a:p>
+          <a:p>
+            <a:pPr algn="l">
+              <a:lnSpc>
+                <a:spcPct val="128000"/>
+              </a:lnSpc>
+            </a:pPr>
+            <a:r>
+              <a:rPr sz="1100" b="0" i="0">
+                <a:solidFill>
+                  <a:srgbClr val="E2E8F0"/>
+                </a:solidFill>
+                <a:latin typeface="Menlo"/>
+              </a:rPr>
+              <a:t>- 异常：35 条传感器卡死值 -&gt; 截断到训练集 1/99 分位</a:t>
+            </a:r>
+          </a:p>
+          <a:p>
+            <a:pPr algn="l">
+              <a:lnSpc>
+                <a:spcPct val="128000"/>
+              </a:lnSpc>
+            </a:pPr>
+            <a:r>
+              <a:rPr sz="1100" b="0" i="0">
+                <a:solidFill>
+                  <a:srgbClr val="E2E8F0"/>
+                </a:solidFill>
+                <a:latin typeface="Menlo"/>
+              </a:rPr>
               <a:t>- 重复：按 batch_id + 时间戳去重，删除 812 条</a:t>
             </a:r>
           </a:p>
@@ -25533,7 +25794,7 @@
                 </a:solidFill>
                 <a:latin typeface="Menlo"/>
               </a:rPr>
-              <a:t>- 训练集：水平翻转 + 高斯噪声；验证/测试：不增强</a:t>
+              <a:t>- 训练集：高斯噪声；验证/测试：不增强</a:t>
             </a:r>
           </a:p>
           <a:p>
